--- a/01-项目实践/机械革命项目/SC-RRT小论文编写/流程图/流程图绘制模板.pptx
+++ b/01-项目实践/机械革命项目/SC-RRT小论文编写/流程图/流程图绘制模板.pptx
@@ -25918,7 +25918,7 @@
         </p:nvSpPr>
         <p:spPr>
           <a:xfrm rot="5400000">
-            <a:off x="1736725" y="2254250"/>
+            <a:off x="1820545" y="2254250"/>
             <a:ext cx="4631055" cy="1834515"/>
           </a:xfrm>
           <a:prstGeom prst="roundRect">
@@ -26737,8 +26737,8 @@
         </p:nvSpPr>
         <p:spPr>
           <a:xfrm rot="5400000">
-            <a:off x="3256915" y="2868295"/>
-            <a:ext cx="604520" cy="288290"/>
+            <a:off x="3142615" y="2983230"/>
+            <a:ext cx="833755" cy="288290"/>
           </a:xfrm>
           <a:prstGeom prst="roundRect">
             <a:avLst/>
@@ -26777,7 +26777,15 @@
                   <a:schemeClr val="tx1"/>
                 </a:solidFill>
               </a:rPr>
-              <a:t>loss</a:t>
+              <a:t>F</a:t>
+            </a:r>
+            <a:r>
+              <a:rPr lang="en-US" altLang="zh-CN" sz="1170" dirty="0">
+                <a:solidFill>
+                  <a:schemeClr val="tx1"/>
+                </a:solidFill>
+              </a:rPr>
+              <a:t>eedback</a:t>
             </a:r>
             <a:endParaRPr lang="en-US" altLang="zh-CN" sz="1170" dirty="0">
               <a:solidFill>
@@ -26798,8 +26806,8 @@
         </p:nvCxnSpPr>
         <p:spPr>
           <a:xfrm rot="5400000" flipV="1">
-            <a:off x="3108643" y="3765233"/>
-            <a:ext cx="1457325" cy="556260"/>
+            <a:off x="3223895" y="3880485"/>
+            <a:ext cx="1227455" cy="555625"/>
           </a:xfrm>
           <a:prstGeom prst="bentConnector2">
             <a:avLst/>
